--- a/Static_Type_Checking_for_Forth.pptx
+++ b/Static_Type_Checking_for_Forth.pptx
@@ -8528,7 +8528,7 @@
                 </a:solidFill>
                 <a:latin typeface="Liberation Mono"/>
               </a:rPr>
-              <a:t>PEEK2   ( a-addr[1] -- X[2] X )</a:t>
+              <a:t>PEEK2   ( a-addr -- X X )</a:t>
             </a:r>
           </a:p>
         </p:txBody>
@@ -9866,7 +9866,7 @@
                 </a:solidFill>
                 <a:latin typeface="Liberation Sans"/>
               </a:rPr>
-              <a:t>Different value-level behavior is acceptable because both paths preserve the same visible numeric interface.</a:t>
+              <a:t>Inputs keep the common subtype; outputs keep the common supertype.</a:t>
             </a:r>
           </a:p>
         </p:txBody>
@@ -9950,7 +9950,7 @@
                 </a:solidFill>
                 <a:latin typeface="Liberation Sans"/>
               </a:rPr>
-              <a:t>The current merge returns one effect; it deliberately does not preserve a set of path-specific alternatives.</a:t>
+              <a:t>Only identities guaranteed by both paths survive; path alternatives are not stored.</a:t>
             </a:r>
           </a:p>
         </p:txBody>
@@ -13043,7 +13043,7 @@
                 </a:solidFill>
                 <a:latin typeface="Liberation Mono"/>
               </a:rPr>
-              <a:t>( a-addr[1] -- X[2] X )</a:t>
+              <a:t>( a-addr -- X X )</a:t>
             </a:r>
           </a:p>
         </p:txBody>
@@ -14581,7 +14581,7 @@
                 </a:solidFill>
                 <a:latin typeface="Liberation Sans"/>
               </a:rPr>
-              <a:t>A sound path-sensitive summary for every branch shuffle</a:t>
+              <a:t>A path-sensitive set of every branch behavior</a:t>
             </a:r>
           </a:p>
           <a:p>
@@ -14760,7 +14760,7 @@
                 </a:solidFill>
                 <a:latin typeface="Liberation Sans"/>
               </a:rPr>
-              <a:t>Known implementation gaps include lossy identity compaction, some top-level linear clashes, and unequal-depth branch alignment.</a:t>
+              <a:t>Known limits include lossy identity compaction, one effect per primitive, and the one-versus-two loop approximation.</a:t>
             </a:r>
           </a:p>
         </p:txBody>
@@ -23612,7 +23612,7 @@
                 </a:solidFill>
                 <a:latin typeface="Liberation Sans"/>
               </a:rPr>
-              <a:t>Matching rule: retain the more specific comparable type; if neither type is a subtype of the other, report a clash.</a:t>
+              <a:t>Composition keeps the more specific comparable boundary type; incomparable types clash.</a:t>
             </a:r>
           </a:p>
         </p:txBody>
